--- a/환경경제학/2026-1/환경경제학_Chapter_03.pptx
+++ b/환경경제학/2026-1/환경경제학_Chapter_03.pptx
@@ -5,7 +5,7 @@
     <p:sldMasterId id="2147483648" r:id="rId1"/>
   </p:sldMasterIdLst>
   <p:notesMasterIdLst>
-    <p:notesMasterId r:id="rId26"/>
+    <p:notesMasterId r:id="rId25"/>
   </p:notesMasterIdLst>
   <p:sldIdLst>
     <p:sldId id="375" r:id="rId2"/>
@@ -18,20 +18,19 @@
     <p:sldId id="583" r:id="rId9"/>
     <p:sldId id="584" r:id="rId10"/>
     <p:sldId id="580" r:id="rId11"/>
-    <p:sldId id="586" r:id="rId12"/>
-    <p:sldId id="587" r:id="rId13"/>
-    <p:sldId id="588" r:id="rId14"/>
-    <p:sldId id="589" r:id="rId15"/>
-    <p:sldId id="590" r:id="rId16"/>
-    <p:sldId id="596" r:id="rId17"/>
-    <p:sldId id="592" r:id="rId18"/>
-    <p:sldId id="593" r:id="rId19"/>
-    <p:sldId id="594" r:id="rId20"/>
-    <p:sldId id="595" r:id="rId21"/>
-    <p:sldId id="597" r:id="rId22"/>
-    <p:sldId id="598" r:id="rId23"/>
-    <p:sldId id="599" r:id="rId24"/>
-    <p:sldId id="364" r:id="rId25"/>
+    <p:sldId id="587" r:id="rId12"/>
+    <p:sldId id="588" r:id="rId13"/>
+    <p:sldId id="589" r:id="rId14"/>
+    <p:sldId id="590" r:id="rId15"/>
+    <p:sldId id="596" r:id="rId16"/>
+    <p:sldId id="592" r:id="rId17"/>
+    <p:sldId id="593" r:id="rId18"/>
+    <p:sldId id="594" r:id="rId19"/>
+    <p:sldId id="595" r:id="rId20"/>
+    <p:sldId id="597" r:id="rId21"/>
+    <p:sldId id="598" r:id="rId22"/>
+    <p:sldId id="599" r:id="rId23"/>
+    <p:sldId id="364" r:id="rId24"/>
   </p:sldIdLst>
   <p:sldSz cx="12192000" cy="6858000"/>
   <p:notesSz cx="6858000" cy="9144000"/>
@@ -231,7 +230,7 @@
           <a:p>
             <a:fld id="{4A5E00EF-AEA4-43E2-9451-8F9C59A39471}" type="datetimeFigureOut">
               <a:rPr lang="ko-KR" altLang="en-US" smtClean="0"/>
-              <a:t>2026-09-04</a:t>
+              <a:t>2026-09-10</a:t>
             </a:fld>
             <a:endParaRPr lang="ko-KR" altLang="en-US"/>
           </a:p>
@@ -653,7 +652,7 @@
           <a:p>
             <a:fld id="{CD32C56F-BD27-4999-9E6D-D4EACE3DA9F4}" type="datetime1">
               <a:rPr lang="ko-KR" altLang="en-US" smtClean="0"/>
-              <a:t>2026-09-04</a:t>
+              <a:t>2026-09-10</a:t>
             </a:fld>
             <a:endParaRPr lang="ko-KR" altLang="en-US"/>
           </a:p>
@@ -867,7 +866,7 @@
           <a:p>
             <a:fld id="{8EF4A19C-72C8-45CA-8E3F-68A7FA345D6C}" type="datetime1">
               <a:rPr lang="ko-KR" altLang="en-US" smtClean="0"/>
-              <a:t>2026-09-04</a:t>
+              <a:t>2026-09-10</a:t>
             </a:fld>
             <a:endParaRPr lang="ko-KR" altLang="en-US"/>
           </a:p>
@@ -1091,7 +1090,7 @@
           <a:p>
             <a:fld id="{56A175B2-010B-4341-954C-5F8F5C70B124}" type="datetime1">
               <a:rPr lang="ko-KR" altLang="en-US" smtClean="0"/>
-              <a:t>2026-09-04</a:t>
+              <a:t>2026-09-10</a:t>
             </a:fld>
             <a:endParaRPr lang="ko-KR" altLang="en-US"/>
           </a:p>
@@ -1305,7 +1304,7 @@
           <a:p>
             <a:fld id="{16B83F9E-22C9-45CA-9E85-070F1D3EF530}" type="datetime1">
               <a:rPr lang="ko-KR" altLang="en-US" smtClean="0"/>
-              <a:t>2026-09-04</a:t>
+              <a:t>2026-09-10</a:t>
             </a:fld>
             <a:endParaRPr lang="ko-KR" altLang="en-US"/>
           </a:p>
@@ -1596,7 +1595,7 @@
           <a:p>
             <a:fld id="{03278F45-FB3C-4C4D-B89A-7BC3F5F229F6}" type="datetime1">
               <a:rPr lang="ko-KR" altLang="en-US" smtClean="0"/>
-              <a:t>2026-09-04</a:t>
+              <a:t>2026-09-10</a:t>
             </a:fld>
             <a:endParaRPr lang="ko-KR" altLang="en-US"/>
           </a:p>
@@ -1989,7 +1988,7 @@
           <a:p>
             <a:fld id="{38FDAC3C-35A6-415C-9F03-738A6AC328B1}" type="datetime1">
               <a:rPr lang="ko-KR" altLang="en-US" smtClean="0"/>
-              <a:t>2026-09-04</a:t>
+              <a:t>2026-09-10</a:t>
             </a:fld>
             <a:endParaRPr lang="ko-KR" altLang="en-US"/>
           </a:p>
@@ -3583,7 +3582,7 @@
           <a:p>
             <a:fld id="{507A0DF1-AEE6-4B0D-89D2-351E7B3EF65C}" type="datetime1">
               <a:rPr lang="ko-KR" altLang="en-US" smtClean="0"/>
-              <a:t>2026-09-04</a:t>
+              <a:t>2026-09-10</a:t>
             </a:fld>
             <a:endParaRPr lang="ko-KR" altLang="en-US"/>
           </a:p>
@@ -4011,7 +4010,7 @@
           <a:p>
             <a:fld id="{CA93B8C9-630F-4D57-944D-04FD37CECCD3}" type="datetime1">
               <a:rPr lang="ko-KR" altLang="en-US" smtClean="0"/>
-              <a:t>2026-09-04</a:t>
+              <a:t>2026-09-10</a:t>
             </a:fld>
             <a:endParaRPr lang="ko-KR" altLang="en-US"/>
           </a:p>
@@ -4168,7 +4167,7 @@
           <a:p>
             <a:fld id="{E986165A-AC43-4902-9541-874ECD310BA3}" type="datetime1">
               <a:rPr lang="ko-KR" altLang="en-US" smtClean="0"/>
-              <a:t>2026-09-04</a:t>
+              <a:t>2026-09-10</a:t>
             </a:fld>
             <a:endParaRPr lang="ko-KR" altLang="en-US"/>
           </a:p>
@@ -4495,7 +4494,7 @@
           <a:p>
             <a:fld id="{47E6EE6D-2B0E-43A9-87A2-7354CDB998F4}" type="datetime1">
               <a:rPr lang="ko-KR" altLang="en-US" smtClean="0"/>
-              <a:t>2026-09-04</a:t>
+              <a:t>2026-09-10</a:t>
             </a:fld>
             <a:endParaRPr lang="ko-KR" altLang="en-US"/>
           </a:p>
@@ -4799,7 +4798,7 @@
           <a:p>
             <a:fld id="{5CC5944E-0BC8-4FAA-9F94-6B4B05834E10}" type="datetime1">
               <a:rPr lang="ko-KR" altLang="en-US" smtClean="0"/>
-              <a:t>2026-09-04</a:t>
+              <a:t>2026-09-10</a:t>
             </a:fld>
             <a:endParaRPr lang="ko-KR" altLang="en-US"/>
           </a:p>
@@ -7376,7 +7375,7 @@
         <p:cNvPr id="1" name="">
           <a:extLst>
             <a:ext uri="{FF2B5EF4-FFF2-40B4-BE49-F238E27FC236}">
-              <a16:creationId xmlns:a16="http://schemas.microsoft.com/office/drawing/2014/main" id="{9C7F0A72-462C-9868-E335-388AC2E78D7C}"/>
+              <a16:creationId xmlns:a16="http://schemas.microsoft.com/office/drawing/2014/main" id="{3EBEE604-36A0-B714-5B51-3C24DCB52E7B}"/>
             </a:ext>
           </a:extLst>
         </p:cNvPr>
@@ -7396,7 +7395,7 @@
           <p:cNvPr id="2" name="제목 1">
             <a:extLst>
               <a:ext uri="{FF2B5EF4-FFF2-40B4-BE49-F238E27FC236}">
-                <a16:creationId xmlns:a16="http://schemas.microsoft.com/office/drawing/2014/main" id="{835CD025-50A1-E2CE-5EFE-E0BCFDA3FE7E}"/>
+                <a16:creationId xmlns:a16="http://schemas.microsoft.com/office/drawing/2014/main" id="{D02B9DC1-7965-39FC-F8EE-AED39346EC9E}"/>
               </a:ext>
             </a:extLst>
           </p:cNvPr>
@@ -7424,7 +7423,7 @@
           <p:cNvPr id="4" name="슬라이드 번호 개체 틀 3">
             <a:extLst>
               <a:ext uri="{FF2B5EF4-FFF2-40B4-BE49-F238E27FC236}">
-                <a16:creationId xmlns:a16="http://schemas.microsoft.com/office/drawing/2014/main" id="{9582598A-BDD3-C634-040C-C74B5728E149}"/>
+                <a16:creationId xmlns:a16="http://schemas.microsoft.com/office/drawing/2014/main" id="{7C2CE838-2999-7F20-E3AF-6A1FCBDBEF7D}"/>
               </a:ext>
             </a:extLst>
           </p:cNvPr>
@@ -7453,7 +7452,7 @@
           <p:cNvPr id="5" name="TextBox 4">
             <a:extLst>
               <a:ext uri="{FF2B5EF4-FFF2-40B4-BE49-F238E27FC236}">
-                <a16:creationId xmlns:a16="http://schemas.microsoft.com/office/drawing/2014/main" id="{8898C154-64D0-E562-F964-C19A6D640A5F}"/>
+                <a16:creationId xmlns:a16="http://schemas.microsoft.com/office/drawing/2014/main" id="{0F5815EC-36A2-5B82-4FD7-1F13393CF023}"/>
               </a:ext>
             </a:extLst>
           </p:cNvPr>
@@ -7721,7 +7720,7 @@
     </p:spTree>
     <p:extLst>
       <p:ext uri="{BB962C8B-B14F-4D97-AF65-F5344CB8AC3E}">
-        <p14:creationId xmlns:p14="http://schemas.microsoft.com/office/powerpoint/2010/main" val="1312305934"/>
+        <p14:creationId xmlns:p14="http://schemas.microsoft.com/office/powerpoint/2010/main" val="3205532275"/>
       </p:ext>
     </p:extLst>
   </p:cSld>
@@ -7732,369 +7731,6 @@
 </file>
 
 <file path=ppt/slides/slide12.xml><?xml version="1.0" encoding="utf-8"?>
-<p:sld xmlns:a="http://schemas.openxmlformats.org/drawingml/2006/main" xmlns:r="http://schemas.openxmlformats.org/officeDocument/2006/relationships" xmlns:p="http://schemas.openxmlformats.org/presentationml/2006/main">
-  <p:cSld>
-    <p:spTree>
-      <p:nvGrpSpPr>
-        <p:cNvPr id="1" name="">
-          <a:extLst>
-            <a:ext uri="{FF2B5EF4-FFF2-40B4-BE49-F238E27FC236}">
-              <a16:creationId xmlns:a16="http://schemas.microsoft.com/office/drawing/2014/main" id="{3EBEE604-36A0-B714-5B51-3C24DCB52E7B}"/>
-            </a:ext>
-          </a:extLst>
-        </p:cNvPr>
-        <p:cNvGrpSpPr/>
-        <p:nvPr/>
-      </p:nvGrpSpPr>
-      <p:grpSpPr>
-        <a:xfrm>
-          <a:off x="0" y="0"/>
-          <a:ext cx="0" cy="0"/>
-          <a:chOff x="0" y="0"/>
-          <a:chExt cx="0" cy="0"/>
-        </a:xfrm>
-      </p:grpSpPr>
-      <p:sp>
-        <p:nvSpPr>
-          <p:cNvPr id="2" name="제목 1">
-            <a:extLst>
-              <a:ext uri="{FF2B5EF4-FFF2-40B4-BE49-F238E27FC236}">
-                <a16:creationId xmlns:a16="http://schemas.microsoft.com/office/drawing/2014/main" id="{D02B9DC1-7965-39FC-F8EE-AED39346EC9E}"/>
-              </a:ext>
-            </a:extLst>
-          </p:cNvPr>
-          <p:cNvSpPr>
-            <a:spLocks noGrp="1"/>
-          </p:cNvSpPr>
-          <p:nvPr>
-            <p:ph type="title"/>
-          </p:nvPr>
-        </p:nvSpPr>
-        <p:spPr/>
-        <p:txBody>
-          <a:bodyPr/>
-          <a:lstStyle/>
-          <a:p>
-            <a:r>
-              <a:rPr lang="ko-KR" altLang="en-US" dirty="0"/>
-              <a:t>비용</a:t>
-            </a:r>
-          </a:p>
-        </p:txBody>
-      </p:sp>
-      <p:sp>
-        <p:nvSpPr>
-          <p:cNvPr id="4" name="슬라이드 번호 개체 틀 3">
-            <a:extLst>
-              <a:ext uri="{FF2B5EF4-FFF2-40B4-BE49-F238E27FC236}">
-                <a16:creationId xmlns:a16="http://schemas.microsoft.com/office/drawing/2014/main" id="{7C2CE838-2999-7F20-E3AF-6A1FCBDBEF7D}"/>
-              </a:ext>
-            </a:extLst>
-          </p:cNvPr>
-          <p:cNvSpPr>
-            <a:spLocks noGrp="1"/>
-          </p:cNvSpPr>
-          <p:nvPr>
-            <p:ph type="sldNum" sz="quarter" idx="12"/>
-          </p:nvPr>
-        </p:nvSpPr>
-        <p:spPr/>
-        <p:txBody>
-          <a:bodyPr/>
-          <a:lstStyle/>
-          <a:p>
-            <a:fld id="{109C872D-39A9-4065-8BF3-6A613116E2A1}" type="slidenum">
-              <a:rPr lang="ko-KR" altLang="en-US" smtClean="0"/>
-              <a:t>12</a:t>
-            </a:fld>
-            <a:endParaRPr lang="ko-KR" altLang="en-US"/>
-          </a:p>
-        </p:txBody>
-      </p:sp>
-      <p:sp>
-        <p:nvSpPr>
-          <p:cNvPr id="5" name="TextBox 4">
-            <a:extLst>
-              <a:ext uri="{FF2B5EF4-FFF2-40B4-BE49-F238E27FC236}">
-                <a16:creationId xmlns:a16="http://schemas.microsoft.com/office/drawing/2014/main" id="{0F5815EC-36A2-5B82-4FD7-1F13393CF023}"/>
-              </a:ext>
-            </a:extLst>
-          </p:cNvPr>
-          <p:cNvSpPr txBox="1"/>
-          <p:nvPr/>
-        </p:nvSpPr>
-        <p:spPr>
-          <a:xfrm>
-            <a:off x="288790" y="787394"/>
-            <a:ext cx="10707658" cy="4476675"/>
-          </a:xfrm>
-          <a:prstGeom prst="rect">
-            <a:avLst/>
-          </a:prstGeom>
-          <a:noFill/>
-        </p:spPr>
-        <p:txBody>
-          <a:bodyPr wrap="square" rtlCol="0" anchor="t">
-            <a:spAutoFit/>
-          </a:bodyPr>
-          <a:lstStyle/>
-          <a:p>
-            <a:pPr marL="377825" indent="-285750">
-              <a:lnSpc>
-                <a:spcPct val="150000"/>
-              </a:lnSpc>
-              <a:buFont typeface="Arial" panose="020B0604020202020204" pitchFamily="34" charset="0"/>
-              <a:buChar char="•"/>
-            </a:pPr>
-            <a:r>
-              <a:rPr lang="ko-KR" altLang="en-US" sz="1600" spc="-50" dirty="0"/>
-              <a:t>생산자는 재화나 서비스를 생산하여 시장에 공급하기 위해서는 생산요소를 투입해야 한다</a:t>
-            </a:r>
-            <a:r>
-              <a:rPr lang="en-US" altLang="ko-KR" sz="1600" spc="-50" dirty="0"/>
-              <a:t>.</a:t>
-            </a:r>
-          </a:p>
-          <a:p>
-            <a:pPr marL="835025" lvl="1" indent="-285750">
-              <a:lnSpc>
-                <a:spcPct val="150000"/>
-              </a:lnSpc>
-              <a:buFont typeface="Wingdings" panose="05000000000000000000" pitchFamily="2" charset="2"/>
-              <a:buChar char="ü"/>
-            </a:pPr>
-            <a:r>
-              <a:rPr lang="ko-KR" altLang="en-US" sz="1600" spc="-50" dirty="0"/>
-              <a:t>아이스크림 공급자는 원료인 우유</a:t>
-            </a:r>
-            <a:r>
-              <a:rPr lang="en-US" altLang="ko-KR" sz="1600" spc="-50" dirty="0"/>
-              <a:t>, </a:t>
-            </a:r>
-            <a:r>
-              <a:rPr lang="ko-KR" altLang="en-US" sz="1600" spc="-50" dirty="0"/>
-              <a:t>물</a:t>
-            </a:r>
-            <a:r>
-              <a:rPr lang="en-US" altLang="ko-KR" sz="1600" spc="-50" dirty="0"/>
-              <a:t>, </a:t>
-            </a:r>
-            <a:r>
-              <a:rPr lang="ko-KR" altLang="en-US" sz="1600" spc="-50" dirty="0"/>
-              <a:t>설탕 등과 함께 노동력 및 공장</a:t>
-            </a:r>
-            <a:r>
-              <a:rPr lang="en-US" altLang="ko-KR" sz="1600" spc="-50" dirty="0"/>
-              <a:t>, </a:t>
-            </a:r>
-            <a:r>
-              <a:rPr lang="ko-KR" altLang="en-US" sz="1600" spc="-50" dirty="0"/>
-              <a:t>기계와 같은 자본재 등을 사용한다</a:t>
-            </a:r>
-            <a:r>
-              <a:rPr lang="en-US" altLang="ko-KR" sz="1600" spc="-50" dirty="0"/>
-              <a:t>.</a:t>
-            </a:r>
-          </a:p>
-          <a:p>
-            <a:pPr marL="1292225" lvl="2" indent="-285750">
-              <a:lnSpc>
-                <a:spcPct val="150000"/>
-              </a:lnSpc>
-              <a:buFont typeface="Wingdings" panose="05000000000000000000" pitchFamily="2" charset="2"/>
-              <a:buChar char="Ø"/>
-            </a:pPr>
-            <a:r>
-              <a:rPr lang="ko-KR" altLang="en-US" sz="1600" spc="-50" dirty="0"/>
-              <a:t>이러한 생산요소는 모두 시장에서 돈을 주고 구입해야 한다</a:t>
-            </a:r>
-            <a:r>
-              <a:rPr lang="en-US" altLang="ko-KR" sz="1600" spc="-50" dirty="0"/>
-              <a:t>.</a:t>
-            </a:r>
-          </a:p>
-          <a:p>
-            <a:pPr marL="1292225" lvl="2" indent="-285750">
-              <a:lnSpc>
-                <a:spcPct val="150000"/>
-              </a:lnSpc>
-              <a:buFont typeface="Wingdings" panose="05000000000000000000" pitchFamily="2" charset="2"/>
-              <a:buChar char="Ø"/>
-            </a:pPr>
-            <a:r>
-              <a:rPr lang="ko-KR" altLang="en-US" sz="1600" spc="-50" dirty="0"/>
-              <a:t>생산요소의 가격이 주어져 있을 경우</a:t>
-            </a:r>
-            <a:r>
-              <a:rPr lang="en-US" altLang="ko-KR" sz="1600" spc="-50" dirty="0"/>
-              <a:t>, </a:t>
-            </a:r>
-            <a:r>
-              <a:rPr lang="ko-KR" altLang="en-US" sz="1600" spc="-50" dirty="0"/>
-              <a:t>한 단위의 아이스크림을 생산하기 위해 소요되는 생산비는 아이스크림 공급자의 기술조건에 따라 영향을 받는다</a:t>
-            </a:r>
-            <a:r>
-              <a:rPr lang="en-US" altLang="ko-KR" sz="1600" spc="-50" dirty="0"/>
-              <a:t>.</a:t>
-            </a:r>
-          </a:p>
-          <a:p>
-            <a:pPr marL="377825" indent="-285750">
-              <a:lnSpc>
-                <a:spcPct val="150000"/>
-              </a:lnSpc>
-              <a:buFont typeface="Arial" panose="020B0604020202020204" pitchFamily="34" charset="0"/>
-              <a:buChar char="•"/>
-            </a:pPr>
-            <a:endParaRPr lang="en-US" altLang="ko-KR" sz="1600" spc="-50" dirty="0"/>
-          </a:p>
-          <a:p>
-            <a:pPr marL="377825" indent="-285750">
-              <a:lnSpc>
-                <a:spcPct val="150000"/>
-              </a:lnSpc>
-              <a:buFont typeface="Arial" panose="020B0604020202020204" pitchFamily="34" charset="0"/>
-              <a:buChar char="•"/>
-            </a:pPr>
-            <a:r>
-              <a:rPr lang="ko-KR" altLang="en-US" sz="1600" spc="-50" dirty="0"/>
-              <a:t>경제학에서의 생산비는 기회비용과 회계비용으로 나눌 수 있다</a:t>
-            </a:r>
-            <a:r>
-              <a:rPr lang="en-US" altLang="ko-KR" sz="1600" spc="-50" dirty="0"/>
-              <a:t>.</a:t>
-            </a:r>
-          </a:p>
-          <a:p>
-            <a:pPr marL="835025" lvl="1" indent="-285750">
-              <a:lnSpc>
-                <a:spcPct val="150000"/>
-              </a:lnSpc>
-              <a:buFont typeface="Wingdings" panose="05000000000000000000" pitchFamily="2" charset="2"/>
-              <a:buChar char="ü"/>
-            </a:pPr>
-            <a:r>
-              <a:rPr lang="en-US" altLang="ko-KR" sz="1600" spc="-50" dirty="0"/>
-              <a:t>(</a:t>
-            </a:r>
-            <a:r>
-              <a:rPr lang="ko-KR" altLang="en-US" sz="1600" spc="-50" dirty="0"/>
-              <a:t>회계비용</a:t>
-            </a:r>
-            <a:r>
-              <a:rPr lang="en-US" altLang="ko-KR" sz="1600" spc="-50" dirty="0"/>
-              <a:t>) </a:t>
-            </a:r>
-            <a:r>
-              <a:rPr lang="ko-KR" altLang="en-US" sz="1600" spc="-50" dirty="0"/>
-              <a:t>회계사가 자산과 부채를 평가하여 대차대조표를 만들 때 비용으로 인정하는 항목들 </a:t>
-            </a:r>
-            <a:endParaRPr lang="en-US" altLang="ko-KR" sz="1600" spc="-50" dirty="0"/>
-          </a:p>
-          <a:p>
-            <a:pPr marL="1292225" lvl="2" indent="-285750">
-              <a:lnSpc>
-                <a:spcPct val="150000"/>
-              </a:lnSpc>
-              <a:buFont typeface="Wingdings" panose="05000000000000000000" pitchFamily="2" charset="2"/>
-              <a:buChar char="Ø"/>
-            </a:pPr>
-            <a:r>
-              <a:rPr lang="ko-KR" altLang="en-US" sz="1600" spc="-50" dirty="0"/>
-              <a:t>임금</a:t>
-            </a:r>
-            <a:r>
-              <a:rPr lang="en-US" altLang="ko-KR" sz="1600" spc="-50" dirty="0"/>
-              <a:t>, </a:t>
-            </a:r>
-            <a:r>
-              <a:rPr lang="ko-KR" altLang="en-US" sz="1600" spc="-50" dirty="0"/>
-              <a:t>원료비</a:t>
-            </a:r>
-            <a:r>
-              <a:rPr lang="en-US" altLang="ko-KR" sz="1600" spc="-50" dirty="0"/>
-              <a:t>, </a:t>
-            </a:r>
-            <a:r>
-              <a:rPr lang="ko-KR" altLang="en-US" sz="1600" spc="-50" dirty="0"/>
-              <a:t>토지 임대료 등 경제주체가 지불한 직접비용</a:t>
-            </a:r>
-            <a:endParaRPr lang="en-US" altLang="ko-KR" sz="1600" spc="-50" dirty="0"/>
-          </a:p>
-          <a:p>
-            <a:pPr marL="835025" lvl="1" indent="-285750">
-              <a:lnSpc>
-                <a:spcPct val="150000"/>
-              </a:lnSpc>
-              <a:buFont typeface="Wingdings" panose="05000000000000000000" pitchFamily="2" charset="2"/>
-              <a:buChar char="ü"/>
-            </a:pPr>
-            <a:r>
-              <a:rPr lang="en-US" altLang="ko-KR" sz="1600" spc="-50" dirty="0"/>
-              <a:t>(</a:t>
-            </a:r>
-            <a:r>
-              <a:rPr lang="ko-KR" altLang="en-US" sz="1600" spc="-50" dirty="0"/>
-              <a:t>기회비용</a:t>
-            </a:r>
-            <a:r>
-              <a:rPr lang="en-US" altLang="ko-KR" sz="1600" spc="-50" dirty="0"/>
-              <a:t>) </a:t>
-            </a:r>
-            <a:r>
-              <a:rPr lang="ko-KR" altLang="en-US" sz="1600" spc="-50" dirty="0"/>
-              <a:t>생산요소가 현재의 용도로 이용되지 않고 다른 용도로 이용되었을 때 얻을 수 있는 최대한의 수익 </a:t>
-            </a:r>
-            <a:endParaRPr lang="en-US" altLang="ko-KR" sz="1600" spc="-50" dirty="0"/>
-          </a:p>
-          <a:p>
-            <a:pPr marL="1292225" lvl="2" indent="-285750">
-              <a:lnSpc>
-                <a:spcPct val="150000"/>
-              </a:lnSpc>
-              <a:buFont typeface="Wingdings" panose="05000000000000000000" pitchFamily="2" charset="2"/>
-              <a:buChar char="Ø"/>
-            </a:pPr>
-            <a:r>
-              <a:rPr lang="ko-KR" altLang="en-US" sz="1600" spc="-50" dirty="0"/>
-              <a:t>공장에서 제품 생산 및 판매를 통한 사업수익 </a:t>
-            </a:r>
-            <a:r>
-              <a:rPr lang="en-US" altLang="ko-KR" sz="1600" spc="-50" dirty="0"/>
-              <a:t>vs. </a:t>
-            </a:r>
-            <a:r>
-              <a:rPr lang="ko-KR" altLang="en-US" sz="1600" spc="-50" dirty="0"/>
-              <a:t>공장 운영을 직접 하지 않고 임대를 통한 임대수익</a:t>
-            </a:r>
-            <a:endParaRPr lang="en-US" altLang="ko-KR" sz="1600" spc="-50" dirty="0"/>
-          </a:p>
-          <a:p>
-            <a:pPr marL="377825" indent="-285750">
-              <a:lnSpc>
-                <a:spcPct val="150000"/>
-              </a:lnSpc>
-              <a:buFont typeface="Arial" panose="020B0604020202020204" pitchFamily="34" charset="0"/>
-              <a:buChar char="•"/>
-            </a:pPr>
-            <a:endParaRPr lang="en-US" altLang="ko-KR" sz="1600" spc="-50" dirty="0"/>
-          </a:p>
-        </p:txBody>
-      </p:sp>
-    </p:spTree>
-    <p:extLst>
-      <p:ext uri="{BB962C8B-B14F-4D97-AF65-F5344CB8AC3E}">
-        <p14:creationId xmlns:p14="http://schemas.microsoft.com/office/powerpoint/2010/main" val="3205532275"/>
-      </p:ext>
-    </p:extLst>
-  </p:cSld>
-  <p:clrMapOvr>
-    <a:masterClrMapping/>
-  </p:clrMapOvr>
-</p:sld>
-</file>
-
-<file path=ppt/slides/slide13.xml><?xml version="1.0" encoding="utf-8"?>
 <p:sld xmlns:a="http://schemas.openxmlformats.org/drawingml/2006/main" xmlns:r="http://schemas.openxmlformats.org/officeDocument/2006/relationships" xmlns:p="http://schemas.openxmlformats.org/presentationml/2006/main">
   <p:cSld>
     <p:spTree>
@@ -8168,7 +7804,7 @@
           <a:p>
             <a:fld id="{109C872D-39A9-4065-8BF3-6A613116E2A1}" type="slidenum">
               <a:rPr lang="ko-KR" altLang="en-US" smtClean="0"/>
-              <a:t>13</a:t>
+              <a:t>12</a:t>
             </a:fld>
             <a:endParaRPr lang="ko-KR" altLang="en-US"/>
           </a:p>
@@ -8372,7 +8008,7 @@
 </p:sld>
 </file>
 
-<file path=ppt/slides/slide14.xml><?xml version="1.0" encoding="utf-8"?>
+<file path=ppt/slides/slide13.xml><?xml version="1.0" encoding="utf-8"?>
 <p:sld xmlns:a="http://schemas.openxmlformats.org/drawingml/2006/main" xmlns:r="http://schemas.openxmlformats.org/officeDocument/2006/relationships" xmlns:p="http://schemas.openxmlformats.org/presentationml/2006/main">
   <p:cSld>
     <p:spTree>
@@ -8446,7 +8082,7 @@
           <a:p>
             <a:fld id="{109C872D-39A9-4065-8BF3-6A613116E2A1}" type="slidenum">
               <a:rPr lang="ko-KR" altLang="en-US" smtClean="0"/>
-              <a:t>14</a:t>
+              <a:t>13</a:t>
             </a:fld>
             <a:endParaRPr lang="ko-KR" altLang="en-US"/>
           </a:p>
@@ -8826,7 +8462,7 @@
 </p:sld>
 </file>
 
-<file path=ppt/slides/slide15.xml><?xml version="1.0" encoding="utf-8"?>
+<file path=ppt/slides/slide14.xml><?xml version="1.0" encoding="utf-8"?>
 <p:sld xmlns:a="http://schemas.openxmlformats.org/drawingml/2006/main" xmlns:r="http://schemas.openxmlformats.org/officeDocument/2006/relationships" xmlns:p="http://schemas.openxmlformats.org/presentationml/2006/main">
   <p:cSld>
     <p:spTree>
@@ -8900,7 +8536,7 @@
           <a:p>
             <a:fld id="{109C872D-39A9-4065-8BF3-6A613116E2A1}" type="slidenum">
               <a:rPr lang="ko-KR" altLang="en-US" smtClean="0"/>
-              <a:t>15</a:t>
+              <a:t>14</a:t>
             </a:fld>
             <a:endParaRPr lang="ko-KR" altLang="en-US"/>
           </a:p>
@@ -9266,7 +8902,7 @@
 </p:sld>
 </file>
 
-<file path=ppt/slides/slide16.xml><?xml version="1.0" encoding="utf-8"?>
+<file path=ppt/slides/slide15.xml><?xml version="1.0" encoding="utf-8"?>
 <p:sld xmlns:a="http://schemas.openxmlformats.org/drawingml/2006/main" xmlns:r="http://schemas.openxmlformats.org/officeDocument/2006/relationships" xmlns:p="http://schemas.openxmlformats.org/presentationml/2006/main">
   <p:cSld>
     <p:spTree>
@@ -9334,7 +8970,7 @@
           <a:p>
             <a:fld id="{109C872D-39A9-4065-8BF3-6A613116E2A1}" type="slidenum">
               <a:rPr lang="ko-KR" altLang="en-US" smtClean="0"/>
-              <a:t>16</a:t>
+              <a:t>15</a:t>
             </a:fld>
             <a:endParaRPr lang="ko-KR" altLang="en-US"/>
           </a:p>
@@ -9383,7 +9019,7 @@
 </p:sld>
 </file>
 
-<file path=ppt/slides/slide17.xml><?xml version="1.0" encoding="utf-8"?>
+<file path=ppt/slides/slide16.xml><?xml version="1.0" encoding="utf-8"?>
 <p:sld xmlns:a="http://schemas.openxmlformats.org/drawingml/2006/main" xmlns:r="http://schemas.openxmlformats.org/officeDocument/2006/relationships" xmlns:p="http://schemas.openxmlformats.org/presentationml/2006/main">
   <p:cSld>
     <p:spTree>
@@ -9457,7 +9093,7 @@
           <a:p>
             <a:fld id="{109C872D-39A9-4065-8BF3-6A613116E2A1}" type="slidenum">
               <a:rPr lang="ko-KR" altLang="en-US" smtClean="0"/>
-              <a:t>17</a:t>
+              <a:t>16</a:t>
             </a:fld>
             <a:endParaRPr lang="ko-KR" altLang="en-US"/>
           </a:p>
@@ -9586,7 +9222,7 @@
 </p:sld>
 </file>
 
-<file path=ppt/slides/slide18.xml><?xml version="1.0" encoding="utf-8"?>
+<file path=ppt/slides/slide17.xml><?xml version="1.0" encoding="utf-8"?>
 <p:sld xmlns:a="http://schemas.openxmlformats.org/drawingml/2006/main" xmlns:r="http://schemas.openxmlformats.org/officeDocument/2006/relationships" xmlns:p="http://schemas.openxmlformats.org/presentationml/2006/main">
   <p:cSld>
     <p:spTree>
@@ -9660,7 +9296,7 @@
           <a:p>
             <a:fld id="{109C872D-39A9-4065-8BF3-6A613116E2A1}" type="slidenum">
               <a:rPr lang="ko-KR" altLang="en-US" smtClean="0"/>
-              <a:t>18</a:t>
+              <a:t>17</a:t>
             </a:fld>
             <a:endParaRPr lang="ko-KR" altLang="en-US"/>
           </a:p>
@@ -9834,7 +9470,7 @@
 </p:sld>
 </file>
 
-<file path=ppt/slides/slide19.xml><?xml version="1.0" encoding="utf-8"?>
+<file path=ppt/slides/slide18.xml><?xml version="1.0" encoding="utf-8"?>
 <p:sld xmlns:a="http://schemas.openxmlformats.org/drawingml/2006/main" xmlns:r="http://schemas.openxmlformats.org/officeDocument/2006/relationships" xmlns:p="http://schemas.openxmlformats.org/presentationml/2006/main">
   <p:cSld>
     <p:spTree>
@@ -9908,7 +9544,7 @@
           <a:p>
             <a:fld id="{109C872D-39A9-4065-8BF3-6A613116E2A1}" type="slidenum">
               <a:rPr lang="ko-KR" altLang="en-US" smtClean="0"/>
-              <a:t>19</a:t>
+              <a:t>18</a:t>
             </a:fld>
             <a:endParaRPr lang="ko-KR" altLang="en-US"/>
           </a:p>
@@ -10627,164 +10263,7 @@
 </p:sld>
 </file>
 
-<file path=ppt/slides/slide2.xml><?xml version="1.0" encoding="utf-8"?>
-<p:sld xmlns:a="http://schemas.openxmlformats.org/drawingml/2006/main" xmlns:r="http://schemas.openxmlformats.org/officeDocument/2006/relationships" xmlns:p="http://schemas.openxmlformats.org/presentationml/2006/main">
-  <p:cSld>
-    <p:spTree>
-      <p:nvGrpSpPr>
-        <p:cNvPr id="1" name="">
-          <a:extLst>
-            <a:ext uri="{FF2B5EF4-FFF2-40B4-BE49-F238E27FC236}">
-              <a16:creationId xmlns:a16="http://schemas.microsoft.com/office/drawing/2014/main" id="{C41D0659-CAFD-F53E-5E96-AE42A73FE935}"/>
-            </a:ext>
-          </a:extLst>
-        </p:cNvPr>
-        <p:cNvGrpSpPr/>
-        <p:nvPr/>
-      </p:nvGrpSpPr>
-      <p:grpSpPr>
-        <a:xfrm>
-          <a:off x="0" y="0"/>
-          <a:ext cx="0" cy="0"/>
-          <a:chOff x="0" y="0"/>
-          <a:chExt cx="0" cy="0"/>
-        </a:xfrm>
-      </p:grpSpPr>
-      <p:pic>
-        <p:nvPicPr>
-          <p:cNvPr id="6" name="그림 5" descr="텍스트, 로고, 원, 폰트이(가) 표시된 사진&#10;&#10;AI 생성 콘텐츠는 정확하지 않을 수 있습니다.">
-            <a:extLst>
-              <a:ext uri="{FF2B5EF4-FFF2-40B4-BE49-F238E27FC236}">
-                <a16:creationId xmlns:a16="http://schemas.microsoft.com/office/drawing/2014/main" id="{D5C3F3A0-36ED-43FB-2D13-6CAA30B083C2}"/>
-              </a:ext>
-            </a:extLst>
-          </p:cNvPr>
-          <p:cNvPicPr>
-            <a:picLocks noChangeAspect="1"/>
-          </p:cNvPicPr>
-          <p:nvPr/>
-        </p:nvPicPr>
-        <p:blipFill>
-          <a:blip r:embed="rId2">
-            <a:alphaModFix amt="20000"/>
-            <a:extLst>
-              <a:ext uri="{28A0092B-C50C-407E-A947-70E740481C1C}">
-                <a14:useLocalDpi xmlns:a14="http://schemas.microsoft.com/office/drawing/2010/main" val="0"/>
-              </a:ext>
-            </a:extLst>
-          </a:blip>
-          <a:stretch>
-            <a:fillRect/>
-          </a:stretch>
-        </p:blipFill>
-        <p:spPr>
-          <a:xfrm>
-            <a:off x="4012070" y="1673061"/>
-            <a:ext cx="4167861" cy="4167861"/>
-          </a:xfrm>
-          <a:prstGeom prst="rect">
-            <a:avLst/>
-          </a:prstGeom>
-        </p:spPr>
-      </p:pic>
-      <p:sp>
-        <p:nvSpPr>
-          <p:cNvPr id="4" name="슬라이드 번호 개체 틀 3">
-            <a:extLst>
-              <a:ext uri="{FF2B5EF4-FFF2-40B4-BE49-F238E27FC236}">
-                <a16:creationId xmlns:a16="http://schemas.microsoft.com/office/drawing/2014/main" id="{A8D19C74-D6C9-BA18-D11B-15A0CD9AF906}"/>
-              </a:ext>
-            </a:extLst>
-          </p:cNvPr>
-          <p:cNvSpPr>
-            <a:spLocks noGrp="1"/>
-          </p:cNvSpPr>
-          <p:nvPr>
-            <p:ph type="sldNum" sz="quarter" idx="12"/>
-          </p:nvPr>
-        </p:nvSpPr>
-        <p:spPr/>
-        <p:txBody>
-          <a:bodyPr/>
-          <a:lstStyle/>
-          <a:p>
-            <a:fld id="{109C872D-39A9-4065-8BF3-6A613116E2A1}" type="slidenum">
-              <a:rPr lang="ko-KR" altLang="en-US" smtClean="0"/>
-              <a:t>2</a:t>
-            </a:fld>
-            <a:endParaRPr lang="ko-KR" altLang="en-US"/>
-          </a:p>
-        </p:txBody>
-      </p:sp>
-      <p:sp>
-        <p:nvSpPr>
-          <p:cNvPr id="7" name="제목 1">
-            <a:extLst>
-              <a:ext uri="{FF2B5EF4-FFF2-40B4-BE49-F238E27FC236}">
-                <a16:creationId xmlns:a16="http://schemas.microsoft.com/office/drawing/2014/main" id="{B58D8A77-45B6-C35A-AFD8-829E4435C90E}"/>
-              </a:ext>
-            </a:extLst>
-          </p:cNvPr>
-          <p:cNvSpPr>
-            <a:spLocks noGrp="1"/>
-          </p:cNvSpPr>
-          <p:nvPr>
-            <p:ph type="title"/>
-          </p:nvPr>
-        </p:nvSpPr>
-        <p:spPr>
-          <a:xfrm>
-            <a:off x="831850" y="2478940"/>
-            <a:ext cx="11007224" cy="1939428"/>
-          </a:xfrm>
-          <a:effectLst>
-            <a:reflection blurRad="50800" stA="45000" endPos="44000" dir="5400000" sy="-100000" algn="bl" rotWithShape="0"/>
-          </a:effectLst>
-        </p:spPr>
-        <p:txBody>
-          <a:bodyPr anchor="b"/>
-          <a:lstStyle/>
-          <a:p>
-            <a:r>
-              <a:rPr lang="en-US" altLang="ko-KR" sz="4000" b="1" i="0" spc="150" dirty="0"/>
-              <a:t>Chapter 3</a:t>
-            </a:r>
-            <a:br>
-              <a:rPr lang="en-US" altLang="ko-KR" sz="4000" b="1" i="0" spc="150" dirty="0"/>
-            </a:br>
-            <a:br>
-              <a:rPr lang="en-US" altLang="ko-KR" sz="4000" b="1" i="0" spc="150" dirty="0"/>
-            </a:br>
-            <a:r>
-              <a:rPr lang="ko-KR" altLang="en-US" sz="4000" b="1" i="0" spc="150" dirty="0"/>
-              <a:t>수요</a:t>
-            </a:r>
-            <a:r>
-              <a:rPr lang="en-US" altLang="ko-KR" sz="4000" b="1" i="0" spc="150" dirty="0"/>
-              <a:t>, </a:t>
-            </a:r>
-            <a:r>
-              <a:rPr lang="ko-KR" altLang="en-US" sz="4000" b="1" i="0" spc="150" dirty="0"/>
-              <a:t>공급 및 시장균형</a:t>
-            </a:r>
-            <a:endParaRPr lang="ko-KR" altLang="en-US" sz="3600" i="0" spc="150" dirty="0"/>
-          </a:p>
-        </p:txBody>
-      </p:sp>
-    </p:spTree>
-    <p:extLst>
-      <p:ext uri="{BB962C8B-B14F-4D97-AF65-F5344CB8AC3E}">
-        <p14:creationId xmlns:p14="http://schemas.microsoft.com/office/powerpoint/2010/main" val="2655123632"/>
-      </p:ext>
-    </p:extLst>
-  </p:cSld>
-  <p:clrMapOvr>
-    <a:masterClrMapping/>
-  </p:clrMapOvr>
-</p:sld>
-</file>
-
-<file path=ppt/slides/slide20.xml><?xml version="1.0" encoding="utf-8"?>
+<file path=ppt/slides/slide19.xml><?xml version="1.0" encoding="utf-8"?>
 <p:sld xmlns:a="http://schemas.openxmlformats.org/drawingml/2006/main" xmlns:r="http://schemas.openxmlformats.org/officeDocument/2006/relationships" xmlns:p="http://schemas.openxmlformats.org/presentationml/2006/main">
   <p:cSld>
     <p:spTree>
@@ -10858,7 +10337,7 @@
           <a:p>
             <a:fld id="{109C872D-39A9-4065-8BF3-6A613116E2A1}" type="slidenum">
               <a:rPr lang="ko-KR" altLang="en-US" smtClean="0"/>
-              <a:t>20</a:t>
+              <a:t>19</a:t>
             </a:fld>
             <a:endParaRPr lang="ko-KR" altLang="en-US"/>
           </a:p>
@@ -11252,7 +10731,164 @@
 </p:sld>
 </file>
 
-<file path=ppt/slides/slide21.xml><?xml version="1.0" encoding="utf-8"?>
+<file path=ppt/slides/slide2.xml><?xml version="1.0" encoding="utf-8"?>
+<p:sld xmlns:a="http://schemas.openxmlformats.org/drawingml/2006/main" xmlns:r="http://schemas.openxmlformats.org/officeDocument/2006/relationships" xmlns:p="http://schemas.openxmlformats.org/presentationml/2006/main">
+  <p:cSld>
+    <p:spTree>
+      <p:nvGrpSpPr>
+        <p:cNvPr id="1" name="">
+          <a:extLst>
+            <a:ext uri="{FF2B5EF4-FFF2-40B4-BE49-F238E27FC236}">
+              <a16:creationId xmlns:a16="http://schemas.microsoft.com/office/drawing/2014/main" id="{C41D0659-CAFD-F53E-5E96-AE42A73FE935}"/>
+            </a:ext>
+          </a:extLst>
+        </p:cNvPr>
+        <p:cNvGrpSpPr/>
+        <p:nvPr/>
+      </p:nvGrpSpPr>
+      <p:grpSpPr>
+        <a:xfrm>
+          <a:off x="0" y="0"/>
+          <a:ext cx="0" cy="0"/>
+          <a:chOff x="0" y="0"/>
+          <a:chExt cx="0" cy="0"/>
+        </a:xfrm>
+      </p:grpSpPr>
+      <p:pic>
+        <p:nvPicPr>
+          <p:cNvPr id="6" name="그림 5" descr="텍스트, 로고, 원, 폰트이(가) 표시된 사진&#10;&#10;AI 생성 콘텐츠는 정확하지 않을 수 있습니다.">
+            <a:extLst>
+              <a:ext uri="{FF2B5EF4-FFF2-40B4-BE49-F238E27FC236}">
+                <a16:creationId xmlns:a16="http://schemas.microsoft.com/office/drawing/2014/main" id="{D5C3F3A0-36ED-43FB-2D13-6CAA30B083C2}"/>
+              </a:ext>
+            </a:extLst>
+          </p:cNvPr>
+          <p:cNvPicPr>
+            <a:picLocks noChangeAspect="1"/>
+          </p:cNvPicPr>
+          <p:nvPr/>
+        </p:nvPicPr>
+        <p:blipFill>
+          <a:blip r:embed="rId2">
+            <a:alphaModFix amt="20000"/>
+            <a:extLst>
+              <a:ext uri="{28A0092B-C50C-407E-A947-70E740481C1C}">
+                <a14:useLocalDpi xmlns:a14="http://schemas.microsoft.com/office/drawing/2010/main" val="0"/>
+              </a:ext>
+            </a:extLst>
+          </a:blip>
+          <a:stretch>
+            <a:fillRect/>
+          </a:stretch>
+        </p:blipFill>
+        <p:spPr>
+          <a:xfrm>
+            <a:off x="4012070" y="1673061"/>
+            <a:ext cx="4167861" cy="4167861"/>
+          </a:xfrm>
+          <a:prstGeom prst="rect">
+            <a:avLst/>
+          </a:prstGeom>
+        </p:spPr>
+      </p:pic>
+      <p:sp>
+        <p:nvSpPr>
+          <p:cNvPr id="4" name="슬라이드 번호 개체 틀 3">
+            <a:extLst>
+              <a:ext uri="{FF2B5EF4-FFF2-40B4-BE49-F238E27FC236}">
+                <a16:creationId xmlns:a16="http://schemas.microsoft.com/office/drawing/2014/main" id="{A8D19C74-D6C9-BA18-D11B-15A0CD9AF906}"/>
+              </a:ext>
+            </a:extLst>
+          </p:cNvPr>
+          <p:cNvSpPr>
+            <a:spLocks noGrp="1"/>
+          </p:cNvSpPr>
+          <p:nvPr>
+            <p:ph type="sldNum" sz="quarter" idx="12"/>
+          </p:nvPr>
+        </p:nvSpPr>
+        <p:spPr/>
+        <p:txBody>
+          <a:bodyPr/>
+          <a:lstStyle/>
+          <a:p>
+            <a:fld id="{109C872D-39A9-4065-8BF3-6A613116E2A1}" type="slidenum">
+              <a:rPr lang="ko-KR" altLang="en-US" smtClean="0"/>
+              <a:t>2</a:t>
+            </a:fld>
+            <a:endParaRPr lang="ko-KR" altLang="en-US"/>
+          </a:p>
+        </p:txBody>
+      </p:sp>
+      <p:sp>
+        <p:nvSpPr>
+          <p:cNvPr id="7" name="제목 1">
+            <a:extLst>
+              <a:ext uri="{FF2B5EF4-FFF2-40B4-BE49-F238E27FC236}">
+                <a16:creationId xmlns:a16="http://schemas.microsoft.com/office/drawing/2014/main" id="{B58D8A77-45B6-C35A-AFD8-829E4435C90E}"/>
+              </a:ext>
+            </a:extLst>
+          </p:cNvPr>
+          <p:cNvSpPr>
+            <a:spLocks noGrp="1"/>
+          </p:cNvSpPr>
+          <p:nvPr>
+            <p:ph type="title"/>
+          </p:nvPr>
+        </p:nvSpPr>
+        <p:spPr>
+          <a:xfrm>
+            <a:off x="831850" y="2478940"/>
+            <a:ext cx="11007224" cy="1939428"/>
+          </a:xfrm>
+          <a:effectLst>
+            <a:reflection blurRad="50800" stA="45000" endPos="44000" dir="5400000" sy="-100000" algn="bl" rotWithShape="0"/>
+          </a:effectLst>
+        </p:spPr>
+        <p:txBody>
+          <a:bodyPr anchor="b"/>
+          <a:lstStyle/>
+          <a:p>
+            <a:r>
+              <a:rPr lang="en-US" altLang="ko-KR" sz="4000" b="1" i="0" spc="150" dirty="0"/>
+              <a:t>Chapter 3</a:t>
+            </a:r>
+            <a:br>
+              <a:rPr lang="en-US" altLang="ko-KR" sz="4000" b="1" i="0" spc="150" dirty="0"/>
+            </a:br>
+            <a:br>
+              <a:rPr lang="en-US" altLang="ko-KR" sz="4000" b="1" i="0" spc="150" dirty="0"/>
+            </a:br>
+            <a:r>
+              <a:rPr lang="ko-KR" altLang="en-US" sz="4000" b="1" i="0" spc="150" dirty="0"/>
+              <a:t>수요</a:t>
+            </a:r>
+            <a:r>
+              <a:rPr lang="en-US" altLang="ko-KR" sz="4000" b="1" i="0" spc="150" dirty="0"/>
+              <a:t>, </a:t>
+            </a:r>
+            <a:r>
+              <a:rPr lang="ko-KR" altLang="en-US" sz="4000" b="1" i="0" spc="150" dirty="0"/>
+              <a:t>공급 및 시장균형</a:t>
+            </a:r>
+            <a:endParaRPr lang="ko-KR" altLang="en-US" sz="3600" i="0" spc="150" dirty="0"/>
+          </a:p>
+        </p:txBody>
+      </p:sp>
+    </p:spTree>
+    <p:extLst>
+      <p:ext uri="{BB962C8B-B14F-4D97-AF65-F5344CB8AC3E}">
+        <p14:creationId xmlns:p14="http://schemas.microsoft.com/office/powerpoint/2010/main" val="2655123632"/>
+      </p:ext>
+    </p:extLst>
+  </p:cSld>
+  <p:clrMapOvr>
+    <a:masterClrMapping/>
+  </p:clrMapOvr>
+</p:sld>
+</file>
+
+<file path=ppt/slides/slide20.xml><?xml version="1.0" encoding="utf-8"?>
 <p:sld xmlns:a="http://schemas.openxmlformats.org/drawingml/2006/main" xmlns:r="http://schemas.openxmlformats.org/officeDocument/2006/relationships" xmlns:p="http://schemas.openxmlformats.org/presentationml/2006/main">
   <p:cSld>
     <p:spTree>
@@ -11335,7 +10971,7 @@
           <a:p>
             <a:fld id="{109C872D-39A9-4065-8BF3-6A613116E2A1}" type="slidenum">
               <a:rPr lang="ko-KR" altLang="en-US" smtClean="0"/>
-              <a:t>21</a:t>
+              <a:t>20</a:t>
             </a:fld>
             <a:endParaRPr lang="ko-KR" altLang="en-US"/>
           </a:p>
@@ -11395,7 +11031,7 @@
 </p:sld>
 </file>
 
-<file path=ppt/slides/slide22.xml><?xml version="1.0" encoding="utf-8"?>
+<file path=ppt/slides/slide21.xml><?xml version="1.0" encoding="utf-8"?>
 <p:sld xmlns:a="http://schemas.openxmlformats.org/drawingml/2006/main" xmlns:r="http://schemas.openxmlformats.org/officeDocument/2006/relationships" xmlns:p="http://schemas.openxmlformats.org/presentationml/2006/main">
   <p:cSld>
     <p:spTree>
@@ -11470,7 +11106,7 @@
           <a:p>
             <a:fld id="{109C872D-39A9-4065-8BF3-6A613116E2A1}" type="slidenum">
               <a:rPr lang="ko-KR" altLang="en-US" smtClean="0"/>
-              <a:t>22</a:t>
+              <a:t>21</a:t>
             </a:fld>
             <a:endParaRPr lang="ko-KR" altLang="en-US"/>
           </a:p>
@@ -11879,7 +11515,7 @@
 </p:sld>
 </file>
 
-<file path=ppt/slides/slide23.xml><?xml version="1.0" encoding="utf-8"?>
+<file path=ppt/slides/slide22.xml><?xml version="1.0" encoding="utf-8"?>
 <p:sld xmlns:a="http://schemas.openxmlformats.org/drawingml/2006/main" xmlns:r="http://schemas.openxmlformats.org/officeDocument/2006/relationships" xmlns:p="http://schemas.openxmlformats.org/presentationml/2006/main">
   <p:cSld>
     <p:spTree>
@@ -11957,7 +11593,7 @@
           <a:p>
             <a:fld id="{109C872D-39A9-4065-8BF3-6A613116E2A1}" type="slidenum">
               <a:rPr lang="ko-KR" altLang="en-US" smtClean="0"/>
-              <a:t>23</a:t>
+              <a:t>22</a:t>
             </a:fld>
             <a:endParaRPr lang="ko-KR" altLang="en-US"/>
           </a:p>
@@ -12358,7 +11994,7 @@
 </p:sld>
 </file>
 
-<file path=ppt/slides/slide24.xml><?xml version="1.0" encoding="utf-8"?>
+<file path=ppt/slides/slide23.xml><?xml version="1.0" encoding="utf-8"?>
 <p:sld xmlns:a="http://schemas.openxmlformats.org/drawingml/2006/main" xmlns:r="http://schemas.openxmlformats.org/officeDocument/2006/relationships" xmlns:p="http://schemas.openxmlformats.org/presentationml/2006/main">
   <p:cSld>
     <p:spTree>
@@ -12486,7 +12122,7 @@
           <a:p>
             <a:fld id="{109C872D-39A9-4065-8BF3-6A613116E2A1}" type="slidenum">
               <a:rPr lang="ko-KR" altLang="en-US" smtClean="0"/>
-              <a:t>24</a:t>
+              <a:t>23</a:t>
             </a:fld>
             <a:endParaRPr lang="ko-KR" altLang="en-US"/>
           </a:p>
@@ -13786,7 +13422,7 @@
           </p:blipFill>
           <p:spPr>
             <a:xfrm>
-              <a:off x="5183981" y="2019301"/>
+              <a:off x="5171281" y="2019301"/>
               <a:ext cx="734220" cy="209550"/>
             </a:xfrm>
             <a:prstGeom prst="rect">
@@ -15146,53 +14782,28 @@
             </a:pPr>
             <a:r>
               <a:rPr lang="ko-KR" altLang="en-US" sz="1600" spc="-50" dirty="0"/>
-              <a:t>이 소비자가 쓸 수 있는 깨끗한 물의 양은 </a:t>
-            </a:r>
-            <a:r>
-              <a:rPr lang="en-US" altLang="ko-KR" sz="1600" spc="-50" dirty="0"/>
-              <a:t>2</a:t>
-            </a:r>
-            <a:r>
-              <a:rPr lang="ko-KR" altLang="en-US" sz="1600" spc="-50" dirty="0"/>
-              <a:t>단위로 정해져 있다</a:t>
-            </a:r>
-            <a:r>
-              <a:rPr lang="en-US" altLang="ko-KR" sz="1600" spc="-50" dirty="0"/>
-              <a:t>.</a:t>
-            </a:r>
-          </a:p>
-          <a:p>
-            <a:pPr marL="1292225" lvl="2" indent="-285750">
+              <a:t>이 소비자는 물을 쓰지 못할 경우와 달리</a:t>
+            </a:r>
+            <a:r>
+              <a:rPr lang="en-US" altLang="ko-KR" sz="1600" spc="-50" dirty="0"/>
+              <a:t>, 2</a:t>
+            </a:r>
+            <a:r>
+              <a:rPr lang="ko-KR" altLang="en-US" sz="1600" spc="-50" dirty="0"/>
+              <a:t>단위의 물을 사용함으로써 어느 정도의 후생이 증가한다고 느낄까</a:t>
+            </a:r>
+            <a:r>
+              <a:rPr lang="en-US" altLang="ko-KR" sz="1600" spc="-50" dirty="0"/>
+              <a:t>?</a:t>
+            </a:r>
+          </a:p>
+          <a:p>
+            <a:pPr marL="835025" lvl="1" indent="-285750">
               <a:lnSpc>
                 <a:spcPct val="150000"/>
               </a:lnSpc>
               <a:buFont typeface="Wingdings" panose="05000000000000000000" pitchFamily="2" charset="2"/>
-              <a:buChar char="Ø"/>
-            </a:pPr>
-            <a:r>
-              <a:rPr lang="ko-KR" altLang="en-US" sz="1600" spc="-50" dirty="0"/>
-              <a:t>이 소비자는 물을 쓰지 못할 경우와 달리</a:t>
-            </a:r>
-            <a:r>
-              <a:rPr lang="en-US" altLang="ko-KR" sz="1600" spc="-50" dirty="0"/>
-              <a:t>, 2</a:t>
-            </a:r>
-            <a:r>
-              <a:rPr lang="ko-KR" altLang="en-US" sz="1600" spc="-50" dirty="0"/>
-              <a:t>단위의 물을 사용함으로써 어느 정도의 후생이 증가한다고 느낄까</a:t>
-            </a:r>
-            <a:r>
-              <a:rPr lang="en-US" altLang="ko-KR" sz="1600" spc="-50" dirty="0"/>
-              <a:t>?</a:t>
-            </a:r>
-          </a:p>
-          <a:p>
-            <a:pPr marL="1292225" lvl="2" indent="-285750">
-              <a:lnSpc>
-                <a:spcPct val="150000"/>
-              </a:lnSpc>
-              <a:buFont typeface="Wingdings" panose="05000000000000000000" pitchFamily="2" charset="2"/>
-              <a:buChar char="Ø"/>
+              <a:buChar char="ü"/>
             </a:pPr>
             <a:r>
               <a:rPr lang="ko-KR" altLang="en-US" sz="1600" spc="-50" dirty="0"/>
@@ -15269,6 +14880,23 @@
               </a:lnSpc>
               <a:buFont typeface="Arial" panose="020B0604020202020204" pitchFamily="34" charset="0"/>
               <a:buChar char="•"/>
+            </a:pPr>
+            <a:r>
+              <a:rPr lang="ko-KR" altLang="en-US" sz="1600" spc="-50" dirty="0"/>
+              <a:t>소비자가 깨끗한 물을 공짜로 사용할 수 있다고 생각해보자</a:t>
+            </a:r>
+            <a:r>
+              <a:rPr lang="en-US" altLang="ko-KR" sz="1600" spc="-50" dirty="0"/>
+              <a:t>.</a:t>
+            </a:r>
+          </a:p>
+          <a:p>
+            <a:pPr marL="835025" lvl="1" indent="-285750">
+              <a:lnSpc>
+                <a:spcPct val="150000"/>
+              </a:lnSpc>
+              <a:buFont typeface="Wingdings" panose="05000000000000000000" pitchFamily="2" charset="2"/>
+              <a:buChar char="ü"/>
             </a:pPr>
             <a:r>
               <a:rPr lang="ko-KR" altLang="en-US" sz="1600" spc="-50" dirty="0"/>
@@ -15478,7 +15106,7 @@
         <p:spPr>
           <a:xfrm>
             <a:off x="288790" y="787394"/>
-            <a:ext cx="7851910" cy="4846007"/>
+            <a:ext cx="7972560" cy="4846007"/>
           </a:xfrm>
           <a:prstGeom prst="rect">
             <a:avLst/>
@@ -15561,7 +15189,7 @@
                 <a:spcPct val="150000"/>
               </a:lnSpc>
               <a:buFont typeface="Wingdings" panose="05000000000000000000" pitchFamily="2" charset="2"/>
-              <a:buChar char="Ø"/>
+              <a:buChar char="ü"/>
             </a:pPr>
             <a:r>
               <a:rPr lang="ko-KR" altLang="en-US" sz="1600" spc="-50" dirty="0"/>
@@ -15608,7 +15236,15 @@
             </a:pPr>
             <a:r>
               <a:rPr lang="ko-KR" altLang="en-US" sz="1600" spc="-50" dirty="0"/>
-              <a:t>만약 소비자가 물을 공짜로 쓰는 게 아니고</a:t>
+              <a:t>이제 상황을 바꾸어</a:t>
+            </a:r>
+            <a:r>
+              <a:rPr lang="en-US" altLang="ko-KR" sz="1600" spc="-50" dirty="0"/>
+              <a:t>,</a:t>
+            </a:r>
+            <a:r>
+              <a:rPr lang="ko-KR" altLang="en-US" sz="1600" spc="-50" dirty="0"/>
+              <a:t> 소비자가 물을 공짜로 쓰는 게 아니고</a:t>
             </a:r>
             <a:r>
               <a:rPr lang="en-US" altLang="ko-KR" sz="1600" spc="-50" dirty="0"/>
@@ -15649,7 +15285,15 @@
             </a:pPr>
             <a:r>
               <a:rPr lang="ko-KR" altLang="en-US" sz="1600" spc="-50" dirty="0"/>
-              <a:t>소비자가 지불할 의사가 있는 총금액에서 소비자가 실제로 지불하는 금액을 빼 준 값을 소비자잉여 </a:t>
+              <a:t>소비자가 지불할 의사가 있는 총금액에서 소비자가 실제로 지불하는 금액을 빼 준 값을 </a:t>
+            </a:r>
+            <a:r>
+              <a:rPr lang="ko-KR" altLang="en-US" sz="1600" b="1" spc="-50" dirty="0"/>
+              <a:t>소비자잉여</a:t>
+            </a:r>
+            <a:r>
+              <a:rPr lang="ko-KR" altLang="en-US" sz="1600" spc="-50" dirty="0"/>
+              <a:t> </a:t>
             </a:r>
             <a:r>
               <a:rPr lang="en-US" altLang="ko-KR" sz="1600" spc="-50" dirty="0"/>
@@ -15840,7 +15484,7 @@
         </p:blipFill>
         <p:spPr>
           <a:xfrm>
-            <a:off x="8021174" y="1541163"/>
+            <a:off x="8186274" y="1524290"/>
             <a:ext cx="3915074" cy="4429387"/>
           </a:xfrm>
           <a:prstGeom prst="rect">
@@ -15862,7 +15506,7 @@
         </p:nvSpPr>
         <p:spPr>
           <a:xfrm>
-            <a:off x="8801237" y="4926122"/>
+            <a:off x="8959987" y="4926122"/>
             <a:ext cx="328306" cy="369332"/>
           </a:xfrm>
           <a:prstGeom prst="rect">
@@ -15898,7 +15542,7 @@
         </p:nvSpPr>
         <p:spPr>
           <a:xfrm>
-            <a:off x="9203908" y="4926122"/>
+            <a:off x="9362658" y="4926122"/>
             <a:ext cx="328306" cy="369332"/>
           </a:xfrm>
           <a:prstGeom prst="rect">
@@ -15934,7 +15578,7 @@
         </p:nvSpPr>
         <p:spPr>
           <a:xfrm>
-            <a:off x="8801237" y="3705524"/>
+            <a:off x="8959987" y="3705524"/>
             <a:ext cx="328306" cy="369332"/>
           </a:xfrm>
           <a:prstGeom prst="rect">
@@ -15970,7 +15614,7 @@
         </p:nvSpPr>
         <p:spPr>
           <a:xfrm>
-            <a:off x="9203908" y="3705524"/>
+            <a:off x="9362658" y="3705524"/>
             <a:ext cx="328306" cy="369332"/>
           </a:xfrm>
           <a:prstGeom prst="rect">
